--- a/SQLTUNING/SQL튜닝_Ch12_교안.pptx
+++ b/SQLTUNING/SQL튜닝_Ch12_교안.pptx
@@ -10867,7 +10867,7 @@
                 </a:solidFill>
                 <a:latin typeface="Consolas"/>
               </a:rPr>
-              <a:t>cq8zvf7njas01   20          132,468      6,623.4      374,094</a:t>
+              <a:t>3w1a060hkngfr   20          132,420      6,621        305,359</a:t>
             </a:r>
           </a:p>
           <a:p>
@@ -10944,7 +10944,7 @@
                 </a:solidFill>
                 <a:latin typeface="Consolas"/>
               </a:rPr>
-              <a:t>-- AVG_BUFFERS : BUFFER_GETS / EXECUTIONS = 132,468 / 20</a:t>
+              <a:t>-- AVG_BUFFERS : BUFFER_GETS / EXECUTIONS = 132,420 / 20</a:t>
             </a:r>
           </a:p>
           <a:p>
@@ -11115,18 +11115,18 @@
                 </a:solidFill>
                 <a:latin typeface="Malgun Gothic"/>
               </a:rPr>
-              <a:t>•  AVG_BUFFERS = 6,623.4 — 1회 평균 비용</a:t>
-            </a:r>
-          </a:p>
-          <a:p>
-            <a:r>
-              <a:rPr sz="1600" b="0">
-                <a:solidFill>
-                  <a:srgbClr val="5A6672"/>
-                </a:solidFill>
-                <a:latin typeface="Malgun Gothic"/>
-              </a:rPr>
-              <a:t>    –  132,468 ÷ 20 = 6,623.4</a:t>
+              <a:t>•  AVG_BUFFERS = 6,621 — 1회 평균 비용</a:t>
+            </a:r>
+          </a:p>
+          <a:p>
+            <a:r>
+              <a:rPr sz="1600" b="0">
+                <a:solidFill>
+                  <a:srgbClr val="5A6672"/>
+                </a:solidFill>
+                <a:latin typeface="Malgun Gothic"/>
+              </a:rPr>
+              <a:t>    –  132,420 ÷ 20 = 6,621</a:t>
             </a:r>
           </a:p>
           <a:p>
@@ -11159,7 +11159,7 @@
                 </a:solidFill>
                 <a:latin typeface="Malgun Gothic"/>
               </a:rPr>
-              <a:t>•  BUFFER_GETS = 132,468 — 총 비용</a:t>
+              <a:t>•  BUFFER_GETS = 132,420 — 총 비용</a:t>
             </a:r>
           </a:p>
           <a:p>
@@ -11937,18 +11937,18 @@
                 </a:solidFill>
                 <a:latin typeface="Malgun Gothic"/>
               </a:rPr>
-              <a:t>•  N+1 패턴: 총 132,468 Buffers</a:t>
-            </a:r>
-          </a:p>
-          <a:p>
-            <a:r>
-              <a:rPr sz="1600" b="0">
-                <a:solidFill>
-                  <a:srgbClr val="5A6672"/>
-                </a:solidFill>
-                <a:latin typeface="Malgun Gothic"/>
-              </a:rPr>
-              <a:t>    –  20번 실행 누적, 1회 평균 6,623</a:t>
+              <a:t>•  N+1 패턴: 총 132,420 Buffers</a:t>
+            </a:r>
+          </a:p>
+          <a:p>
+            <a:r>
+              <a:rPr sz="1600" b="0">
+                <a:solidFill>
+                  <a:srgbClr val="5A6672"/>
+                </a:solidFill>
+                <a:latin typeface="Malgun Gothic"/>
+              </a:rPr>
+              <a:t>    –  20번 실행 누적, 1회 평균 6,621</a:t>
             </a:r>
           </a:p>
           <a:p>
@@ -11981,7 +11981,7 @@
                 </a:solidFill>
                 <a:latin typeface="Malgun Gothic"/>
               </a:rPr>
-              <a:t>•  비율: 132,468 ÷ 6,645 ≈ 19.9배</a:t>
+              <a:t>•  비율: 132,420 ÷ 6,645 ≈ 19.9배</a:t>
             </a:r>
           </a:p>
           <a:p>
@@ -14282,7 +14282,7 @@
                 </a:solidFill>
                 <a:latin typeface="Malgun Gothic"/>
               </a:rPr>
-              <a:t>    –  그것만으로도 개별 조회 1회의 비용을 6,623에서 훨씬 작은 값(인덱스 탐색 수준)으로 낮출 수 있다</a:t>
+              <a:t>    –  그것만으로도 개별 조회 1회의 비용을 6,621에서 훨씬 작은 값(인덱스 탐색 수준)으로 낮출 수 있다</a:t>
             </a:r>
           </a:p>
           <a:p>
@@ -15575,7 +15575,7 @@
                 </a:solidFill>
                 <a:latin typeface="Consolas"/>
               </a:rPr>
-              <a:t>| N+1 (개별 반복 조회)  | 20        | 132,468     | 매번 CLAIM_DETAILS Full Scan   |</a:t>
+              <a:t>| N+1 (개별 반복 조회)  | 20        | 132,420     | 매번 CLAIM_DETAILS Full Scan   |</a:t>
             </a:r>
           </a:p>
           <a:p>
@@ -15630,7 +15630,7 @@
                 </a:solidFill>
                 <a:latin typeface="Consolas"/>
               </a:rPr>
-              <a:t>  비율 : 132,468 / 6,645 = 약 19.9 배</a:t>
+              <a:t>  비율 : 132,420 / 6,645 = 약 19.9 배</a:t>
             </a:r>
           </a:p>
           <a:p>
@@ -15652,7 +15652,7 @@
                 </a:solidFill>
                 <a:latin typeface="Consolas"/>
               </a:rPr>
-              <a:t>  N+1  1회 평균 Buffers : 6,623.4   (132,468 / 20)</a:t>
+              <a:t>  N+1  1회 평균 Buffers : 6,621     (132,420 / 20)</a:t>
             </a:r>
           </a:p>
           <a:p>
@@ -15867,7 +15867,7 @@
                 </a:solidFill>
                 <a:latin typeface="Malgun Gothic"/>
               </a:rPr>
-              <a:t>    –  실측: 20번 반복 132,468 Buffers, 1회 평균 6,623.4</a:t>
+              <a:t>    –  실측: 20번 반복 132,420 Buffers, 1회 평균 6,621</a:t>
             </a:r>
           </a:p>
           <a:p>
